--- a/generated/Tier 1 Broker Scorecards/InsurNorth Corp_Broker_Scorecard.pptx
+++ b/generated/Tier 1 Broker Scorecards/InsurNorth Corp_Broker_Scorecard.pptx
@@ -3394,7 +3394,7 @@
                         <a:rPr sz="900">
                           <a:latin typeface="Segoe UI"/>
                         </a:rPr>
-                        <a:t>Tier 1  |  6.96% / 15.00%</a:t>
+                        <a:t>Tier 1  |  6.92% / 15.00%</a:t>
                       </a:r>
                     </a:p>
                   </a:txBody>
@@ -3653,7 +3653,7 @@
                         <a:rPr sz="900">
                           <a:latin typeface="Segoe UI"/>
                         </a:rPr>
-                        <a:t>Fleet Subs: 37  |  Binds: 1</a:t>
+                        <a:t>Fleet Subs: 36  |  Binds: 1</a:t>
                       </a:r>
                     </a:p>
                   </a:txBody>
@@ -3766,7 +3766,7 @@
                         <a:rPr sz="900">
                           <a:latin typeface="Segoe UI"/>
                         </a:rPr>
-                        <a:t>Non-Fleet Subs: 121  |  Binds: 10</a:t>
+                        <a:t>Non-Fleet Subs: 123  |  Binds: 10</a:t>
                       </a:r>
                     </a:p>
                   </a:txBody>
@@ -4428,7 +4428,7 @@
                           </a:solidFill>
                           <a:latin typeface="Segoe UI"/>
                         </a:rPr>
-                        <a:t>19</a:t>
+                        <a:t>20</a:t>
                       </a:r>
                     </a:p>
                   </a:txBody>
@@ -4707,7 +4707,7 @@
                           </a:solidFill>
                           <a:latin typeface="Segoe UI"/>
                         </a:rPr>
-                        <a:t>10.5%</a:t>
+                        <a:t>10.0%</a:t>
                       </a:r>
                     </a:p>
                   </a:txBody>

--- a/generated/Tier 1 Broker Scorecards/InsurNorth Corp_Broker_Scorecard.pptx
+++ b/generated/Tier 1 Broker Scorecards/InsurNorth Corp_Broker_Scorecard.pptx
@@ -3394,7 +3394,7 @@
                         <a:rPr sz="900">
                           <a:latin typeface="Segoe UI"/>
                         </a:rPr>
-                        <a:t>Tier 1  |  6.92% / 15.00%</a:t>
+                        <a:t>Tier 1  |  6.21% / 15.00%</a:t>
                       </a:r>
                     </a:p>
                   </a:txBody>
@@ -3690,7 +3690,7 @@
                         <a:rPr sz="900">
                           <a:latin typeface="Segoe UI"/>
                         </a:rPr>
-                        <a:t>Fleet Bound Premium: $110,034.56</a:t>
+                        <a:t>Fleet Bound Premium: $131,665.97</a:t>
                       </a:r>
                     </a:p>
                   </a:txBody>
@@ -3727,7 +3727,7 @@
                         <a:rPr sz="900">
                           <a:latin typeface="Segoe UI"/>
                         </a:rPr>
-                        <a:t>Fleet Book %: 28.4%</a:t>
+                        <a:t>Fleet Book %: 33.9%</a:t>
                       </a:r>
                     </a:p>
                   </a:txBody>
@@ -3766,7 +3766,7 @@
                         <a:rPr sz="900">
                           <a:latin typeface="Segoe UI"/>
                         </a:rPr>
-                        <a:t>Non-Fleet Subs: 123  |  Binds: 10</a:t>
+                        <a:t>Non-Fleet Subs: 125  |  Binds: 9</a:t>
                       </a:r>
                     </a:p>
                   </a:txBody>
@@ -3803,7 +3803,7 @@
                         <a:rPr sz="900">
                           <a:latin typeface="Segoe UI"/>
                         </a:rPr>
-                        <a:t>Non-Fleet Bound Premium: $278,065.86</a:t>
+                        <a:t>Non-Fleet Bound Premium: $256,434.45</a:t>
                       </a:r>
                     </a:p>
                   </a:txBody>
@@ -3840,7 +3840,7 @@
                         <a:rPr sz="900">
                           <a:latin typeface="Segoe UI"/>
                         </a:rPr>
-                        <a:t>Non-Fleet Book %: 71.6%</a:t>
+                        <a:t>Non-Fleet Book %: 66.1%</a:t>
                       </a:r>
                     </a:p>
                   </a:txBody>
@@ -4428,7 +4428,7 @@
                           </a:solidFill>
                           <a:latin typeface="Segoe UI"/>
                         </a:rPr>
-                        <a:t>20</a:t>
+                        <a:t>22</a:t>
                       </a:r>
                     </a:p>
                   </a:txBody>
@@ -4707,7 +4707,7 @@
                           </a:solidFill>
                           <a:latin typeface="Segoe UI"/>
                         </a:rPr>
-                        <a:t>10.0%</a:t>
+                        <a:t>9.1%</a:t>
                       </a:r>
                     </a:p>
                   </a:txBody>

--- a/generated/Tier 1 Broker Scorecards/InsurNorth Corp_Broker_Scorecard.pptx
+++ b/generated/Tier 1 Broker Scorecards/InsurNorth Corp_Broker_Scorecard.pptx
@@ -3357,7 +3357,7 @@
                         <a:rPr sz="800">
                           <a:latin typeface="Segoe UI"/>
                         </a:rPr>
-                        <a:t>$1,276,104.98 / $1,159,321.90 / $388,100.42</a:t>
+                        <a:t>$1,276,104.98 / $1,161,517.90 / $390,296.42</a:t>
                       </a:r>
                     </a:p>
                   </a:txBody>
@@ -3394,7 +3394,7 @@
                         <a:rPr sz="900">
                           <a:latin typeface="Segoe UI"/>
                         </a:rPr>
-                        <a:t>Tier 1  |  6.21% / 15.00%</a:t>
+                        <a:t>Tier 1  |  6.83% / 15.00%</a:t>
                       </a:r>
                     </a:p>
                   </a:txBody>
@@ -3431,7 +3431,7 @@
                         <a:rPr sz="900">
                           <a:latin typeface="Segoe UI"/>
                         </a:rPr>
-                        <a:t>$1,786,546.97  (21.7% achieved)</a:t>
+                        <a:t>$1,786,546.97  (21.8% achieved)</a:t>
                       </a:r>
                     </a:p>
                   </a:txBody>
@@ -3690,7 +3690,7 @@
                         <a:rPr sz="900">
                           <a:latin typeface="Segoe UI"/>
                         </a:rPr>
-                        <a:t>Fleet Bound Premium: $131,665.97</a:t>
+                        <a:t>Fleet Bound Premium: $110,657.17</a:t>
                       </a:r>
                     </a:p>
                   </a:txBody>
@@ -3727,7 +3727,7 @@
                         <a:rPr sz="900">
                           <a:latin typeface="Segoe UI"/>
                         </a:rPr>
-                        <a:t>Fleet Book %: 33.9%</a:t>
+                        <a:t>Fleet Book %: 28.4%</a:t>
                       </a:r>
                     </a:p>
                   </a:txBody>
@@ -3766,7 +3766,7 @@
                         <a:rPr sz="900">
                           <a:latin typeface="Segoe UI"/>
                         </a:rPr>
-                        <a:t>Non-Fleet Subs: 125  |  Binds: 9</a:t>
+                        <a:t>Non-Fleet Subs: 125  |  Binds: 10</a:t>
                       </a:r>
                     </a:p>
                   </a:txBody>
@@ -3803,7 +3803,7 @@
                         <a:rPr sz="900">
                           <a:latin typeface="Segoe UI"/>
                         </a:rPr>
-                        <a:t>Non-Fleet Bound Premium: $256,434.45</a:t>
+                        <a:t>Non-Fleet Bound Premium: $279,639.25</a:t>
                       </a:r>
                     </a:p>
                   </a:txBody>
@@ -3840,7 +3840,7 @@
                         <a:rPr sz="900">
                           <a:latin typeface="Segoe UI"/>
                         </a:rPr>
-                        <a:t>Non-Fleet Book %: 66.1%</a:t>
+                        <a:t>Non-Fleet Book %: 71.6%</a:t>
                       </a:r>
                     </a:p>
                   </a:txBody>
@@ -4707,7 +4707,7 @@
                           </a:solidFill>
                           <a:latin typeface="Segoe UI"/>
                         </a:rPr>
-                        <a:t>9.1%</a:t>
+                        <a:t>13.6%</a:t>
                       </a:r>
                     </a:p>
                   </a:txBody>
@@ -4983,7 +4983,7 @@
                           </a:solidFill>
                           <a:latin typeface="Segoe UI"/>
                         </a:rPr>
-                        <a:t>2</a:t>
+                        <a:t>3</a:t>
                       </a:r>
                     </a:p>
                   </a:txBody>
@@ -5262,7 +5262,7 @@
                           </a:solidFill>
                           <a:latin typeface="Segoe UI"/>
                         </a:rPr>
-                        <a:t>$26.9K</a:t>
+                        <a:t>$29.1K</a:t>
                       </a:r>
                     </a:p>
                   </a:txBody>

--- a/generated/Tier 1 Broker Scorecards/InsurNorth Corp_Broker_Scorecard.pptx
+++ b/generated/Tier 1 Broker Scorecards/InsurNorth Corp_Broker_Scorecard.pptx
@@ -3357,7 +3357,7 @@
                         <a:rPr sz="800">
                           <a:latin typeface="Segoe UI"/>
                         </a:rPr>
-                        <a:t>$1,276,104.98 / $1,161,517.90 / $390,296.42</a:t>
+                        <a:t>$1,276,104.98 / $1,173,146.33 / $401,924.85</a:t>
                       </a:r>
                     </a:p>
                   </a:txBody>
@@ -3394,7 +3394,7 @@
                         <a:rPr sz="900">
                           <a:latin typeface="Segoe UI"/>
                         </a:rPr>
-                        <a:t>Tier 1  |  6.83% / 15.00%</a:t>
+                        <a:t>Tier 1  |  7.45% / 15.00%</a:t>
                       </a:r>
                     </a:p>
                   </a:txBody>
@@ -3431,7 +3431,7 @@
                         <a:rPr sz="900">
                           <a:latin typeface="Segoe UI"/>
                         </a:rPr>
-                        <a:t>$1,786,546.97  (21.8% achieved)</a:t>
+                        <a:t>$1,786,546.97  (22.5% achieved)</a:t>
                       </a:r>
                     </a:p>
                   </a:txBody>
@@ -3690,7 +3690,7 @@
                         <a:rPr sz="900">
                           <a:latin typeface="Segoe UI"/>
                         </a:rPr>
-                        <a:t>Fleet Bound Premium: $110,657.17</a:t>
+                        <a:t>Fleet Bound Premium: $111,125.22</a:t>
                       </a:r>
                     </a:p>
                   </a:txBody>
@@ -3727,7 +3727,7 @@
                         <a:rPr sz="900">
                           <a:latin typeface="Segoe UI"/>
                         </a:rPr>
-                        <a:t>Fleet Book %: 28.4%</a:t>
+                        <a:t>Fleet Book %: 27.6%</a:t>
                       </a:r>
                     </a:p>
                   </a:txBody>
@@ -3766,7 +3766,7 @@
                         <a:rPr sz="900">
                           <a:latin typeface="Segoe UI"/>
                         </a:rPr>
-                        <a:t>Non-Fleet Subs: 125  |  Binds: 10</a:t>
+                        <a:t>Non-Fleet Subs: 125  |  Binds: 11</a:t>
                       </a:r>
                     </a:p>
                   </a:txBody>
@@ -3803,7 +3803,7 @@
                         <a:rPr sz="900">
                           <a:latin typeface="Segoe UI"/>
                         </a:rPr>
-                        <a:t>Non-Fleet Bound Premium: $279,639.25</a:t>
+                        <a:t>Non-Fleet Bound Premium: $290,799.63</a:t>
                       </a:r>
                     </a:p>
                   </a:txBody>
@@ -3840,7 +3840,7 @@
                         <a:rPr sz="900">
                           <a:latin typeface="Segoe UI"/>
                         </a:rPr>
-                        <a:t>Non-Fleet Book %: 71.6%</a:t>
+                        <a:t>Non-Fleet Book %: 72.4%</a:t>
                       </a:r>
                     </a:p>
                   </a:txBody>
@@ -4428,7 +4428,7 @@
                           </a:solidFill>
                           <a:latin typeface="Segoe UI"/>
                         </a:rPr>
-                        <a:t>22</a:t>
+                        <a:t>23</a:t>
                       </a:r>
                     </a:p>
                   </a:txBody>
@@ -4707,7 +4707,7 @@
                           </a:solidFill>
                           <a:latin typeface="Segoe UI"/>
                         </a:rPr>
-                        <a:t>13.6%</a:t>
+                        <a:t>17.4%</a:t>
                       </a:r>
                     </a:p>
                   </a:txBody>
@@ -4983,7 +4983,7 @@
                           </a:solidFill>
                           <a:latin typeface="Segoe UI"/>
                         </a:rPr>
-                        <a:t>3</a:t>
+                        <a:t>4</a:t>
                       </a:r>
                     </a:p>
                   </a:txBody>
@@ -5262,7 +5262,7 @@
                           </a:solidFill>
                           <a:latin typeface="Segoe UI"/>
                         </a:rPr>
-                        <a:t>$29.1K</a:t>
+                        <a:t>$40.7K</a:t>
                       </a:r>
                     </a:p>
                   </a:txBody>

--- a/generated/Tier 1 Broker Scorecards/InsurNorth Corp_Broker_Scorecard.pptx
+++ b/generated/Tier 1 Broker Scorecards/InsurNorth Corp_Broker_Scorecard.pptx
@@ -3394,7 +3394,7 @@
                         <a:rPr sz="900">
                           <a:latin typeface="Segoe UI"/>
                         </a:rPr>
-                        <a:t>Tier 1  |  7.45% / 15.00%</a:t>
+                        <a:t>Tier 1  |  7.32% / 15.00%</a:t>
                       </a:r>
                     </a:p>
                   </a:txBody>
@@ -3653,7 +3653,7 @@
                         <a:rPr sz="900">
                           <a:latin typeface="Segoe UI"/>
                         </a:rPr>
-                        <a:t>Fleet Subs: 36  |  Binds: 1</a:t>
+                        <a:t>Fleet Subs: 38  |  Binds: 1</a:t>
                       </a:r>
                     </a:p>
                   </a:txBody>
@@ -3766,7 +3766,7 @@
                         <a:rPr sz="900">
                           <a:latin typeface="Segoe UI"/>
                         </a:rPr>
-                        <a:t>Non-Fleet Subs: 125  |  Binds: 11</a:t>
+                        <a:t>Non-Fleet Subs: 126  |  Binds: 11</a:t>
                       </a:r>
                     </a:p>
                   </a:txBody>
@@ -4428,7 +4428,7 @@
                           </a:solidFill>
                           <a:latin typeface="Segoe UI"/>
                         </a:rPr>
-                        <a:t>23</a:t>
+                        <a:t>26</a:t>
                       </a:r>
                     </a:p>
                   </a:txBody>
@@ -4707,7 +4707,7 @@
                           </a:solidFill>
                           <a:latin typeface="Segoe UI"/>
                         </a:rPr>
-                        <a:t>17.4%</a:t>
+                        <a:t>11.5%</a:t>
                       </a:r>
                     </a:p>
                   </a:txBody>
@@ -4983,7 +4983,7 @@
                           </a:solidFill>
                           <a:latin typeface="Segoe UI"/>
                         </a:rPr>
-                        <a:t>4</a:t>
+                        <a:t>3</a:t>
                       </a:r>
                     </a:p>
                   </a:txBody>

--- a/generated/Tier 1 Broker Scorecards/InsurNorth Corp_Broker_Scorecard.pptx
+++ b/generated/Tier 1 Broker Scorecards/InsurNorth Corp_Broker_Scorecard.pptx
@@ -3394,7 +3394,7 @@
                         <a:rPr sz="900">
                           <a:latin typeface="Segoe UI"/>
                         </a:rPr>
-                        <a:t>Tier 1  |  7.32% / 15.00%</a:t>
+                        <a:t>Tier 1  |  7.23% / 15.00%</a:t>
                       </a:r>
                     </a:p>
                   </a:txBody>
@@ -3653,7 +3653,7 @@
                         <a:rPr sz="900">
                           <a:latin typeface="Segoe UI"/>
                         </a:rPr>
-                        <a:t>Fleet Subs: 38  |  Binds: 1</a:t>
+                        <a:t>Fleet Subs: 39  |  Binds: 1</a:t>
                       </a:r>
                     </a:p>
                   </a:txBody>
@@ -3766,7 +3766,7 @@
                         <a:rPr sz="900">
                           <a:latin typeface="Segoe UI"/>
                         </a:rPr>
-                        <a:t>Non-Fleet Subs: 126  |  Binds: 11</a:t>
+                        <a:t>Non-Fleet Subs: 127  |  Binds: 11</a:t>
                       </a:r>
                     </a:p>
                   </a:txBody>
@@ -4428,7 +4428,7 @@
                           </a:solidFill>
                           <a:latin typeface="Segoe UI"/>
                         </a:rPr>
-                        <a:t>26</a:t>
+                        <a:t>28</a:t>
                       </a:r>
                     </a:p>
                   </a:txBody>
@@ -4707,7 +4707,7 @@
                           </a:solidFill>
                           <a:latin typeface="Segoe UI"/>
                         </a:rPr>
-                        <a:t>11.5%</a:t>
+                        <a:t>10.7%</a:t>
                       </a:r>
                     </a:p>
                   </a:txBody>

--- a/generated/Tier 1 Broker Scorecards/InsurNorth Corp_Broker_Scorecard.pptx
+++ b/generated/Tier 1 Broker Scorecards/InsurNorth Corp_Broker_Scorecard.pptx
@@ -3357,7 +3357,7 @@
                         <a:rPr sz="800">
                           <a:latin typeface="Segoe UI"/>
                         </a:rPr>
-                        <a:t>$1,276,104.98 / $1,173,146.33 / $401,924.85</a:t>
+                        <a:t>$1,276,104.98 / $1,259,282.92 / $488,061.44</a:t>
                       </a:r>
                     </a:p>
                   </a:txBody>
@@ -3394,7 +3394,7 @@
                         <a:rPr sz="900">
                           <a:latin typeface="Segoe UI"/>
                         </a:rPr>
-                        <a:t>Tier 1  |  7.23% / 15.00%</a:t>
+                        <a:t>Tier 1  |  7.83% / 15.00%</a:t>
                       </a:r>
                     </a:p>
                   </a:txBody>
@@ -3431,7 +3431,7 @@
                         <a:rPr sz="900">
                           <a:latin typeface="Segoe UI"/>
                         </a:rPr>
-                        <a:t>$1,786,546.97  (22.5% achieved)</a:t>
+                        <a:t>$1,786,546.97  (27.3% achieved)</a:t>
                       </a:r>
                     </a:p>
                   </a:txBody>
@@ -3653,7 +3653,7 @@
                         <a:rPr sz="900">
                           <a:latin typeface="Segoe UI"/>
                         </a:rPr>
-                        <a:t>Fleet Subs: 39  |  Binds: 1</a:t>
+                        <a:t>Fleet Subs: 39  |  Binds: 2</a:t>
                       </a:r>
                     </a:p>
                   </a:txBody>
@@ -3690,7 +3690,7 @@
                         <a:rPr sz="900">
                           <a:latin typeface="Segoe UI"/>
                         </a:rPr>
-                        <a:t>Fleet Bound Premium: $111,125.22</a:t>
+                        <a:t>Fleet Bound Premium: $197,979.01</a:t>
                       </a:r>
                     </a:p>
                   </a:txBody>
@@ -3727,7 +3727,7 @@
                         <a:rPr sz="900">
                           <a:latin typeface="Segoe UI"/>
                         </a:rPr>
-                        <a:t>Fleet Book %: 27.6%</a:t>
+                        <a:t>Fleet Book %: 40.6%</a:t>
                       </a:r>
                     </a:p>
                   </a:txBody>
@@ -3803,7 +3803,7 @@
                         <a:rPr sz="900">
                           <a:latin typeface="Segoe UI"/>
                         </a:rPr>
-                        <a:t>Non-Fleet Bound Premium: $290,799.63</a:t>
+                        <a:t>Non-Fleet Bound Premium: $290,082.43</a:t>
                       </a:r>
                     </a:p>
                   </a:txBody>
@@ -3840,7 +3840,7 @@
                         <a:rPr sz="900">
                           <a:latin typeface="Segoe UI"/>
                         </a:rPr>
-                        <a:t>Non-Fleet Book %: 72.4%</a:t>
+                        <a:t>Non-Fleet Book %: 59.4%</a:t>
                       </a:r>
                     </a:p>
                   </a:txBody>
@@ -4707,7 +4707,7 @@
                           </a:solidFill>
                           <a:latin typeface="Segoe UI"/>
                         </a:rPr>
-                        <a:t>10.7%</a:t>
+                        <a:t>14.3%</a:t>
                       </a:r>
                     </a:p>
                   </a:txBody>
@@ -4983,7 +4983,7 @@
                           </a:solidFill>
                           <a:latin typeface="Segoe UI"/>
                         </a:rPr>
-                        <a:t>3</a:t>
+                        <a:t>4</a:t>
                       </a:r>
                     </a:p>
                   </a:txBody>
@@ -5262,7 +5262,7 @@
                           </a:solidFill>
                           <a:latin typeface="Segoe UI"/>
                         </a:rPr>
-                        <a:t>$40.7K</a:t>
+                        <a:t>$126.9K</a:t>
                       </a:r>
                     </a:p>
                   </a:txBody>

--- a/generated/Tier 1 Broker Scorecards/InsurNorth Corp_Broker_Scorecard.pptx
+++ b/generated/Tier 1 Broker Scorecards/InsurNorth Corp_Broker_Scorecard.pptx
@@ -3357,7 +3357,7 @@
                         <a:rPr sz="800">
                           <a:latin typeface="Segoe UI"/>
                         </a:rPr>
-                        <a:t>$1,276,104.98 / $1,259,282.92 / $488,061.44</a:t>
+                        <a:t>$1,276,104.98 / $1,259,438.04 / $488,216.56</a:t>
                       </a:r>
                     </a:p>
                   </a:txBody>
@@ -3394,7 +3394,7 @@
                         <a:rPr sz="900">
                           <a:latin typeface="Segoe UI"/>
                         </a:rPr>
-                        <a:t>Tier 1  |  7.83% / 15.00%</a:t>
+                        <a:t>Tier 1  |  7.78% / 15.00%</a:t>
                       </a:r>
                     </a:p>
                   </a:txBody>
@@ -3690,7 +3690,7 @@
                         <a:rPr sz="900">
                           <a:latin typeface="Segoe UI"/>
                         </a:rPr>
-                        <a:t>Fleet Bound Premium: $197,979.01</a:t>
+                        <a:t>Fleet Bound Premium: $197,972.38</a:t>
                       </a:r>
                     </a:p>
                   </a:txBody>
@@ -3766,7 +3766,7 @@
                         <a:rPr sz="900">
                           <a:latin typeface="Segoe UI"/>
                         </a:rPr>
-                        <a:t>Non-Fleet Subs: 127  |  Binds: 11</a:t>
+                        <a:t>Non-Fleet Subs: 128  |  Binds: 11</a:t>
                       </a:r>
                     </a:p>
                   </a:txBody>
@@ -3803,7 +3803,7 @@
                         <a:rPr sz="900">
                           <a:latin typeface="Segoe UI"/>
                         </a:rPr>
-                        <a:t>Non-Fleet Bound Premium: $290,082.43</a:t>
+                        <a:t>Non-Fleet Bound Premium: $290,244.18</a:t>
                       </a:r>
                     </a:p>
                   </a:txBody>
@@ -4428,7 +4428,7 @@
                           </a:solidFill>
                           <a:latin typeface="Segoe UI"/>
                         </a:rPr>
-                        <a:t>28</a:t>
+                        <a:t>29</a:t>
                       </a:r>
                     </a:p>
                   </a:txBody>
@@ -4707,7 +4707,7 @@
                           </a:solidFill>
                           <a:latin typeface="Segoe UI"/>
                         </a:rPr>
-                        <a:t>14.3%</a:t>
+                        <a:t>17.2%</a:t>
                       </a:r>
                     </a:p>
                   </a:txBody>
@@ -4983,7 +4983,7 @@
                           </a:solidFill>
                           <a:latin typeface="Segoe UI"/>
                         </a:rPr>
-                        <a:t>4</a:t>
+                        <a:t>5</a:t>
                       </a:r>
                     </a:p>
                   </a:txBody>
@@ -5262,7 +5262,7 @@
                           </a:solidFill>
                           <a:latin typeface="Segoe UI"/>
                         </a:rPr>
-                        <a:t>$126.9K</a:t>
+                        <a:t>$127.0K</a:t>
                       </a:r>
                     </a:p>
                   </a:txBody>

--- a/generated/Tier 1 Broker Scorecards/InsurNorth Corp_Broker_Scorecard.pptx
+++ b/generated/Tier 1 Broker Scorecards/InsurNorth Corp_Broker_Scorecard.pptx
@@ -3394,7 +3394,7 @@
                         <a:rPr sz="900">
                           <a:latin typeface="Segoe UI"/>
                         </a:rPr>
-                        <a:t>Tier 1  |  7.78% / 15.00%</a:t>
+                        <a:t>Tier 1  |  7.10% / 15.00%</a:t>
                       </a:r>
                     </a:p>
                   </a:txBody>
@@ -3653,7 +3653,7 @@
                         <a:rPr sz="900">
                           <a:latin typeface="Segoe UI"/>
                         </a:rPr>
-                        <a:t>Fleet Subs: 39  |  Binds: 2</a:t>
+                        <a:t>Fleet Subs: 39  |  Binds: 1</a:t>
                       </a:r>
                     </a:p>
                   </a:txBody>
@@ -3690,7 +3690,7 @@
                         <a:rPr sz="900">
                           <a:latin typeface="Segoe UI"/>
                         </a:rPr>
-                        <a:t>Fleet Bound Premium: $197,972.38</a:t>
+                        <a:t>Fleet Bound Premium: $134,925.66</a:t>
                       </a:r>
                     </a:p>
                   </a:txBody>
@@ -3727,7 +3727,7 @@
                         <a:rPr sz="900">
                           <a:latin typeface="Segoe UI"/>
                         </a:rPr>
-                        <a:t>Fleet Book %: 40.6%</a:t>
+                        <a:t>Fleet Book %: 27.6%</a:t>
                       </a:r>
                     </a:p>
                   </a:txBody>
@@ -3766,7 +3766,7 @@
                         <a:rPr sz="900">
                           <a:latin typeface="Segoe UI"/>
                         </a:rPr>
-                        <a:t>Non-Fleet Subs: 128  |  Binds: 11</a:t>
+                        <a:t>Non-Fleet Subs: 130  |  Binds: 11</a:t>
                       </a:r>
                     </a:p>
                   </a:txBody>
@@ -3803,7 +3803,7 @@
                         <a:rPr sz="900">
                           <a:latin typeface="Segoe UI"/>
                         </a:rPr>
-                        <a:t>Non-Fleet Bound Premium: $290,244.18</a:t>
+                        <a:t>Non-Fleet Bound Premium: $353,290.90</a:t>
                       </a:r>
                     </a:p>
                   </a:txBody>
@@ -3840,7 +3840,7 @@
                         <a:rPr sz="900">
                           <a:latin typeface="Segoe UI"/>
                         </a:rPr>
-                        <a:t>Non-Fleet Book %: 59.4%</a:t>
+                        <a:t>Non-Fleet Book %: 72.4%</a:t>
                       </a:r>
                     </a:p>
                   </a:txBody>
@@ -4428,7 +4428,7 @@
                           </a:solidFill>
                           <a:latin typeface="Segoe UI"/>
                         </a:rPr>
-                        <a:t>29</a:t>
+                        <a:t>31</a:t>
                       </a:r>
                     </a:p>
                   </a:txBody>
@@ -4707,7 +4707,7 @@
                           </a:solidFill>
                           <a:latin typeface="Segoe UI"/>
                         </a:rPr>
-                        <a:t>17.2%</a:t>
+                        <a:t>12.9%</a:t>
                       </a:r>
                     </a:p>
                   </a:txBody>
@@ -4983,7 +4983,7 @@
                           </a:solidFill>
                           <a:latin typeface="Segoe UI"/>
                         </a:rPr>
-                        <a:t>5</a:t>
+                        <a:t>4</a:t>
                       </a:r>
                     </a:p>
                   </a:txBody>

--- a/generated/Tier 1 Broker Scorecards/InsurNorth Corp_Broker_Scorecard.pptx
+++ b/generated/Tier 1 Broker Scorecards/InsurNorth Corp_Broker_Scorecard.pptx
@@ -3357,7 +3357,7 @@
                         <a:rPr sz="800">
                           <a:latin typeface="Segoe UI"/>
                         </a:rPr>
-                        <a:t>$1,276,104.98 / $1,259,438.04 / $488,216.56</a:t>
+                        <a:t>$1,276,104.98 / $1,288,178.99 / $516,957.51</a:t>
                       </a:r>
                     </a:p>
                   </a:txBody>
@@ -3394,7 +3394,7 @@
                         <a:rPr sz="900">
                           <a:latin typeface="Segoe UI"/>
                         </a:rPr>
-                        <a:t>Tier 1  |  7.10% / 15.00%</a:t>
+                        <a:t>Tier 1  |  7.65% / 15.00%</a:t>
                       </a:r>
                     </a:p>
                   </a:txBody>
@@ -3431,7 +3431,7 @@
                         <a:rPr sz="900">
                           <a:latin typeface="Segoe UI"/>
                         </a:rPr>
-                        <a:t>$1,786,546.97  (27.3% achieved)</a:t>
+                        <a:t>$1,786,546.97  (28.9% achieved)</a:t>
                       </a:r>
                     </a:p>
                   </a:txBody>
@@ -3653,7 +3653,7 @@
                         <a:rPr sz="900">
                           <a:latin typeface="Segoe UI"/>
                         </a:rPr>
-                        <a:t>Fleet Subs: 39  |  Binds: 1</a:t>
+                        <a:t>Fleet Subs: 38  |  Binds: 1</a:t>
                       </a:r>
                     </a:p>
                   </a:txBody>
@@ -3690,7 +3690,7 @@
                         <a:rPr sz="900">
                           <a:latin typeface="Segoe UI"/>
                         </a:rPr>
-                        <a:t>Fleet Bound Premium: $134,925.66</a:t>
+                        <a:t>Fleet Bound Premium: $133,213.46</a:t>
                       </a:r>
                     </a:p>
                   </a:txBody>
@@ -3727,7 +3727,7 @@
                         <a:rPr sz="900">
                           <a:latin typeface="Segoe UI"/>
                         </a:rPr>
-                        <a:t>Fleet Book %: 27.6%</a:t>
+                        <a:t>Fleet Book %: 25.8%</a:t>
                       </a:r>
                     </a:p>
                   </a:txBody>
@@ -3766,7 +3766,7 @@
                         <a:rPr sz="900">
                           <a:latin typeface="Segoe UI"/>
                         </a:rPr>
-                        <a:t>Non-Fleet Subs: 130  |  Binds: 11</a:t>
+                        <a:t>Non-Fleet Subs: 132  |  Binds: 12</a:t>
                       </a:r>
                     </a:p>
                   </a:txBody>
@@ -3803,7 +3803,7 @@
                         <a:rPr sz="900">
                           <a:latin typeface="Segoe UI"/>
                         </a:rPr>
-                        <a:t>Non-Fleet Bound Premium: $353,290.90</a:t>
+                        <a:t>Non-Fleet Bound Premium: $383,744.05</a:t>
                       </a:r>
                     </a:p>
                   </a:txBody>
@@ -3840,7 +3840,7 @@
                         <a:rPr sz="900">
                           <a:latin typeface="Segoe UI"/>
                         </a:rPr>
-                        <a:t>Non-Fleet Book %: 72.4%</a:t>
+                        <a:t>Non-Fleet Book %: 74.2%</a:t>
                       </a:r>
                     </a:p>
                   </a:txBody>
@@ -4428,7 +4428,7 @@
                           </a:solidFill>
                           <a:latin typeface="Segoe UI"/>
                         </a:rPr>
-                        <a:t>31</a:t>
+                        <a:t>32</a:t>
                       </a:r>
                     </a:p>
                   </a:txBody>
@@ -4707,7 +4707,7 @@
                           </a:solidFill>
                           <a:latin typeface="Segoe UI"/>
                         </a:rPr>
-                        <a:t>12.9%</a:t>
+                        <a:t>15.6%</a:t>
                       </a:r>
                     </a:p>
                   </a:txBody>
@@ -4983,7 +4983,7 @@
                           </a:solidFill>
                           <a:latin typeface="Segoe UI"/>
                         </a:rPr>
-                        <a:t>4</a:t>
+                        <a:t>5</a:t>
                       </a:r>
                     </a:p>
                   </a:txBody>
@@ -5262,7 +5262,7 @@
                           </a:solidFill>
                           <a:latin typeface="Segoe UI"/>
                         </a:rPr>
-                        <a:t>$127.0K</a:t>
+                        <a:t>$155.8K</a:t>
                       </a:r>
                     </a:p>
                   </a:txBody>

--- a/generated/Tier 1 Broker Scorecards/InsurNorth Corp_Broker_Scorecard.pptx
+++ b/generated/Tier 1 Broker Scorecards/InsurNorth Corp_Broker_Scorecard.pptx
@@ -3653,7 +3653,7 @@
                         <a:rPr sz="900">
                           <a:latin typeface="Segoe UI"/>
                         </a:rPr>
-                        <a:t>Fleet Subs: 38  |  Binds: 1</a:t>
+                        <a:t>Fleet Subs: 39  |  Binds: 1</a:t>
                       </a:r>
                     </a:p>
                   </a:txBody>
@@ -3766,7 +3766,7 @@
                         <a:rPr sz="900">
                           <a:latin typeface="Segoe UI"/>
                         </a:rPr>
-                        <a:t>Non-Fleet Subs: 132  |  Binds: 12</a:t>
+                        <a:t>Non-Fleet Subs: 131  |  Binds: 12</a:t>
                       </a:r>
                     </a:p>
                   </a:txBody>

--- a/generated/Tier 1 Broker Scorecards/InsurNorth Corp_Broker_Scorecard.pptx
+++ b/generated/Tier 1 Broker Scorecards/InsurNorth Corp_Broker_Scorecard.pptx
@@ -3357,7 +3357,7 @@
                         <a:rPr sz="800">
                           <a:latin typeface="Segoe UI"/>
                         </a:rPr>
-                        <a:t>$1,276,104.98 / $1,288,178.99 / $516,957.51</a:t>
+                        <a:t>$1,276,104.98 / $838,485.87 / $516,957.51</a:t>
                       </a:r>
                     </a:p>
                   </a:txBody>
